--- a/Extras/Economics of Project Management.pptx
+++ b/Extras/Economics of Project Management.pptx
@@ -16,6 +16,7 @@
     <p:sldId id="264" r:id="rId10"/>
     <p:sldId id="267" r:id="rId11"/>
     <p:sldId id="266" r:id="rId12"/>
+    <p:sldId id="268" r:id="rId13"/>
   </p:sldIdLst>
   <p:sldSz cx="12192000" cy="6858000"/>
   <p:notesSz cx="6858000" cy="9144000"/>
@@ -624,7 +625,7 @@
           <a:p>
             <a:fld id="{E9DF187F-4815-419E-8F35-3823A7E7BFBF}" type="datetimeFigureOut">
               <a:rPr lang="en-IN" smtClean="0"/>
-              <a:t>13-11-2022</a:t>
+              <a:t>14-11-2022</a:t>
             </a:fld>
             <a:endParaRPr lang="en-IN"/>
           </a:p>
@@ -920,7 +921,7 @@
           <a:p>
             <a:fld id="{E9DF187F-4815-419E-8F35-3823A7E7BFBF}" type="datetimeFigureOut">
               <a:rPr lang="en-IN" smtClean="0"/>
-              <a:t>13-11-2022</a:t>
+              <a:t>14-11-2022</a:t>
             </a:fld>
             <a:endParaRPr lang="en-IN"/>
           </a:p>
@@ -1168,7 +1169,7 @@
           <a:p>
             <a:fld id="{E9DF187F-4815-419E-8F35-3823A7E7BFBF}" type="datetimeFigureOut">
               <a:rPr lang="en-IN" smtClean="0"/>
-              <a:t>13-11-2022</a:t>
+              <a:t>14-11-2022</a:t>
             </a:fld>
             <a:endParaRPr lang="en-IN"/>
           </a:p>
@@ -1708,7 +1709,7 @@
           <a:p>
             <a:fld id="{E9DF187F-4815-419E-8F35-3823A7E7BFBF}" type="datetimeFigureOut">
               <a:rPr lang="en-IN" smtClean="0"/>
-              <a:t>13-11-2022</a:t>
+              <a:t>14-11-2022</a:t>
             </a:fld>
             <a:endParaRPr lang="en-IN"/>
           </a:p>
@@ -1956,7 +1957,7 @@
           <a:p>
             <a:fld id="{E9DF187F-4815-419E-8F35-3823A7E7BFBF}" type="datetimeFigureOut">
               <a:rPr lang="en-IN" smtClean="0"/>
-              <a:t>13-11-2022</a:t>
+              <a:t>14-11-2022</a:t>
             </a:fld>
             <a:endParaRPr lang="en-IN"/>
           </a:p>
@@ -2488,7 +2489,7 @@
           <a:p>
             <a:fld id="{E9DF187F-4815-419E-8F35-3823A7E7BFBF}" type="datetimeFigureOut">
               <a:rPr lang="en-IN" smtClean="0"/>
-              <a:t>13-11-2022</a:t>
+              <a:t>14-11-2022</a:t>
             </a:fld>
             <a:endParaRPr lang="en-IN"/>
           </a:p>
@@ -2785,7 +2786,7 @@
           <a:p>
             <a:fld id="{E9DF187F-4815-419E-8F35-3823A7E7BFBF}" type="datetimeFigureOut">
               <a:rPr lang="en-IN" smtClean="0"/>
-              <a:t>13-11-2022</a:t>
+              <a:t>14-11-2022</a:t>
             </a:fld>
             <a:endParaRPr lang="en-IN"/>
           </a:p>
@@ -2959,7 +2960,7 @@
           <a:p>
             <a:fld id="{E9DF187F-4815-419E-8F35-3823A7E7BFBF}" type="datetimeFigureOut">
               <a:rPr lang="en-IN" smtClean="0"/>
-              <a:t>13-11-2022</a:t>
+              <a:t>14-11-2022</a:t>
             </a:fld>
             <a:endParaRPr lang="en-IN"/>
           </a:p>
@@ -3139,7 +3140,7 @@
           <a:p>
             <a:fld id="{E9DF187F-4815-419E-8F35-3823A7E7BFBF}" type="datetimeFigureOut">
               <a:rPr lang="en-IN" smtClean="0"/>
-              <a:t>13-11-2022</a:t>
+              <a:t>14-11-2022</a:t>
             </a:fld>
             <a:endParaRPr lang="en-IN"/>
           </a:p>
@@ -3309,7 +3310,7 @@
           <a:p>
             <a:fld id="{E9DF187F-4815-419E-8F35-3823A7E7BFBF}" type="datetimeFigureOut">
               <a:rPr lang="en-IN" smtClean="0"/>
-              <a:t>13-11-2022</a:t>
+              <a:t>14-11-2022</a:t>
             </a:fld>
             <a:endParaRPr lang="en-IN"/>
           </a:p>
@@ -3560,7 +3561,7 @@
           <a:p>
             <a:fld id="{E9DF187F-4815-419E-8F35-3823A7E7BFBF}" type="datetimeFigureOut">
               <a:rPr lang="en-IN" smtClean="0"/>
-              <a:t>13-11-2022</a:t>
+              <a:t>14-11-2022</a:t>
             </a:fld>
             <a:endParaRPr lang="en-IN"/>
           </a:p>
@@ -3857,7 +3858,7 @@
           <a:p>
             <a:fld id="{E9DF187F-4815-419E-8F35-3823A7E7BFBF}" type="datetimeFigureOut">
               <a:rPr lang="en-IN" smtClean="0"/>
-              <a:t>13-11-2022</a:t>
+              <a:t>14-11-2022</a:t>
             </a:fld>
             <a:endParaRPr lang="en-IN"/>
           </a:p>
@@ -4299,7 +4300,7 @@
           <a:p>
             <a:fld id="{E9DF187F-4815-419E-8F35-3823A7E7BFBF}" type="datetimeFigureOut">
               <a:rPr lang="en-IN" smtClean="0"/>
-              <a:t>13-11-2022</a:t>
+              <a:t>14-11-2022</a:t>
             </a:fld>
             <a:endParaRPr lang="en-IN"/>
           </a:p>
@@ -4417,7 +4418,7 @@
           <a:p>
             <a:fld id="{E9DF187F-4815-419E-8F35-3823A7E7BFBF}" type="datetimeFigureOut">
               <a:rPr lang="en-IN" smtClean="0"/>
-              <a:t>13-11-2022</a:t>
+              <a:t>14-11-2022</a:t>
             </a:fld>
             <a:endParaRPr lang="en-IN"/>
           </a:p>
@@ -4512,7 +4513,7 @@
           <a:p>
             <a:fld id="{E9DF187F-4815-419E-8F35-3823A7E7BFBF}" type="datetimeFigureOut">
               <a:rPr lang="en-IN" smtClean="0"/>
-              <a:t>13-11-2022</a:t>
+              <a:t>14-11-2022</a:t>
             </a:fld>
             <a:endParaRPr lang="en-IN"/>
           </a:p>
@@ -4795,7 +4796,7 @@
           <a:p>
             <a:fld id="{E9DF187F-4815-419E-8F35-3823A7E7BFBF}" type="datetimeFigureOut">
               <a:rPr lang="en-IN" smtClean="0"/>
-              <a:t>13-11-2022</a:t>
+              <a:t>14-11-2022</a:t>
             </a:fld>
             <a:endParaRPr lang="en-IN"/>
           </a:p>
@@ -5086,7 +5087,7 @@
           <a:p>
             <a:fld id="{E9DF187F-4815-419E-8F35-3823A7E7BFBF}" type="datetimeFigureOut">
               <a:rPr lang="en-IN" smtClean="0"/>
-              <a:t>13-11-2022</a:t>
+              <a:t>14-11-2022</a:t>
             </a:fld>
             <a:endParaRPr lang="en-IN"/>
           </a:p>
@@ -5616,7 +5617,7 @@
           <a:p>
             <a:fld id="{E9DF187F-4815-419E-8F35-3823A7E7BFBF}" type="datetimeFigureOut">
               <a:rPr lang="en-IN" smtClean="0"/>
-              <a:t>13-11-2022</a:t>
+              <a:t>14-11-2022</a:t>
             </a:fld>
             <a:endParaRPr lang="en-IN"/>
           </a:p>
@@ -6718,6 +6719,69 @@
 </p:sld>
 </file>
 
+<file path=ppt/slides/slide12.xml><?xml version="1.0" encoding="utf-8"?>
+<p:sld xmlns:a="http://schemas.openxmlformats.org/drawingml/2006/main" xmlns:r="http://schemas.openxmlformats.org/officeDocument/2006/relationships" xmlns:p="http://schemas.openxmlformats.org/presentationml/2006/main">
+  <p:cSld>
+    <p:spTree>
+      <p:nvGrpSpPr>
+        <p:cNvPr id="1" name=""/>
+        <p:cNvGrpSpPr/>
+        <p:nvPr/>
+      </p:nvGrpSpPr>
+      <p:grpSpPr>
+        <a:xfrm>
+          <a:off x="0" y="0"/>
+          <a:ext cx="0" cy="0"/>
+          <a:chOff x="0" y="0"/>
+          <a:chExt cx="0" cy="0"/>
+        </a:xfrm>
+      </p:grpSpPr>
+      <p:sp>
+        <p:nvSpPr>
+          <p:cNvPr id="2" name="Title 1">
+            <a:extLst>
+              <a:ext uri="{FF2B5EF4-FFF2-40B4-BE49-F238E27FC236}">
+                <a16:creationId xmlns:a16="http://schemas.microsoft.com/office/drawing/2014/main" id="{AE97CE36-EF03-C14E-892C-8AB10FBBDFEF}"/>
+              </a:ext>
+            </a:extLst>
+          </p:cNvPr>
+          <p:cNvSpPr>
+            <a:spLocks noGrp="1"/>
+          </p:cNvSpPr>
+          <p:nvPr>
+            <p:ph type="title"/>
+          </p:nvPr>
+        </p:nvSpPr>
+        <p:spPr>
+          <a:xfrm>
+            <a:off x="1288368" y="2552700"/>
+            <a:ext cx="10018713" cy="1752599"/>
+          </a:xfrm>
+        </p:spPr>
+        <p:txBody>
+          <a:bodyPr/>
+          <a:lstStyle/>
+          <a:p>
+            <a:r>
+              <a:rPr lang="en-IN" dirty="0"/>
+              <a:t>THANK YOU</a:t>
+            </a:r>
+          </a:p>
+        </p:txBody>
+      </p:sp>
+    </p:spTree>
+    <p:extLst>
+      <p:ext uri="{BB962C8B-B14F-4D97-AF65-F5344CB8AC3E}">
+        <p14:creationId xmlns:p14="http://schemas.microsoft.com/office/powerpoint/2010/main" val="1185119051"/>
+      </p:ext>
+    </p:extLst>
+  </p:cSld>
+  <p:clrMapOvr>
+    <a:masterClrMapping/>
+  </p:clrMapOvr>
+</p:sld>
+</file>
+
 <file path=ppt/slides/slide2.xml><?xml version="1.0" encoding="utf-8"?>
 <p:sld xmlns:a="http://schemas.openxmlformats.org/drawingml/2006/main" xmlns:r="http://schemas.openxmlformats.org/officeDocument/2006/relationships" xmlns:p="http://schemas.openxmlformats.org/presentationml/2006/main">
   <p:cSld>

--- a/Extras/Economics of Project Management.pptx
+++ b/Extras/Economics of Project Management.pptx
@@ -625,7 +625,7 @@
           <a:p>
             <a:fld id="{E9DF187F-4815-419E-8F35-3823A7E7BFBF}" type="datetimeFigureOut">
               <a:rPr lang="en-IN" smtClean="0"/>
-              <a:t>14-11-2022</a:t>
+              <a:t>17-11-2022</a:t>
             </a:fld>
             <a:endParaRPr lang="en-IN"/>
           </a:p>
@@ -921,7 +921,7 @@
           <a:p>
             <a:fld id="{E9DF187F-4815-419E-8F35-3823A7E7BFBF}" type="datetimeFigureOut">
               <a:rPr lang="en-IN" smtClean="0"/>
-              <a:t>14-11-2022</a:t>
+              <a:t>17-11-2022</a:t>
             </a:fld>
             <a:endParaRPr lang="en-IN"/>
           </a:p>
@@ -1169,7 +1169,7 @@
           <a:p>
             <a:fld id="{E9DF187F-4815-419E-8F35-3823A7E7BFBF}" type="datetimeFigureOut">
               <a:rPr lang="en-IN" smtClean="0"/>
-              <a:t>14-11-2022</a:t>
+              <a:t>17-11-2022</a:t>
             </a:fld>
             <a:endParaRPr lang="en-IN"/>
           </a:p>
@@ -1709,7 +1709,7 @@
           <a:p>
             <a:fld id="{E9DF187F-4815-419E-8F35-3823A7E7BFBF}" type="datetimeFigureOut">
               <a:rPr lang="en-IN" smtClean="0"/>
-              <a:t>14-11-2022</a:t>
+              <a:t>17-11-2022</a:t>
             </a:fld>
             <a:endParaRPr lang="en-IN"/>
           </a:p>
@@ -1957,7 +1957,7 @@
           <a:p>
             <a:fld id="{E9DF187F-4815-419E-8F35-3823A7E7BFBF}" type="datetimeFigureOut">
               <a:rPr lang="en-IN" smtClean="0"/>
-              <a:t>14-11-2022</a:t>
+              <a:t>17-11-2022</a:t>
             </a:fld>
             <a:endParaRPr lang="en-IN"/>
           </a:p>
@@ -2489,7 +2489,7 @@
           <a:p>
             <a:fld id="{E9DF187F-4815-419E-8F35-3823A7E7BFBF}" type="datetimeFigureOut">
               <a:rPr lang="en-IN" smtClean="0"/>
-              <a:t>14-11-2022</a:t>
+              <a:t>17-11-2022</a:t>
             </a:fld>
             <a:endParaRPr lang="en-IN"/>
           </a:p>
@@ -2786,7 +2786,7 @@
           <a:p>
             <a:fld id="{E9DF187F-4815-419E-8F35-3823A7E7BFBF}" type="datetimeFigureOut">
               <a:rPr lang="en-IN" smtClean="0"/>
-              <a:t>14-11-2022</a:t>
+              <a:t>17-11-2022</a:t>
             </a:fld>
             <a:endParaRPr lang="en-IN"/>
           </a:p>
@@ -2960,7 +2960,7 @@
           <a:p>
             <a:fld id="{E9DF187F-4815-419E-8F35-3823A7E7BFBF}" type="datetimeFigureOut">
               <a:rPr lang="en-IN" smtClean="0"/>
-              <a:t>14-11-2022</a:t>
+              <a:t>17-11-2022</a:t>
             </a:fld>
             <a:endParaRPr lang="en-IN"/>
           </a:p>
@@ -3140,7 +3140,7 @@
           <a:p>
             <a:fld id="{E9DF187F-4815-419E-8F35-3823A7E7BFBF}" type="datetimeFigureOut">
               <a:rPr lang="en-IN" smtClean="0"/>
-              <a:t>14-11-2022</a:t>
+              <a:t>17-11-2022</a:t>
             </a:fld>
             <a:endParaRPr lang="en-IN"/>
           </a:p>
@@ -3310,7 +3310,7 @@
           <a:p>
             <a:fld id="{E9DF187F-4815-419E-8F35-3823A7E7BFBF}" type="datetimeFigureOut">
               <a:rPr lang="en-IN" smtClean="0"/>
-              <a:t>14-11-2022</a:t>
+              <a:t>17-11-2022</a:t>
             </a:fld>
             <a:endParaRPr lang="en-IN"/>
           </a:p>
@@ -3561,7 +3561,7 @@
           <a:p>
             <a:fld id="{E9DF187F-4815-419E-8F35-3823A7E7BFBF}" type="datetimeFigureOut">
               <a:rPr lang="en-IN" smtClean="0"/>
-              <a:t>14-11-2022</a:t>
+              <a:t>17-11-2022</a:t>
             </a:fld>
             <a:endParaRPr lang="en-IN"/>
           </a:p>
@@ -3858,7 +3858,7 @@
           <a:p>
             <a:fld id="{E9DF187F-4815-419E-8F35-3823A7E7BFBF}" type="datetimeFigureOut">
               <a:rPr lang="en-IN" smtClean="0"/>
-              <a:t>14-11-2022</a:t>
+              <a:t>17-11-2022</a:t>
             </a:fld>
             <a:endParaRPr lang="en-IN"/>
           </a:p>
@@ -4300,7 +4300,7 @@
           <a:p>
             <a:fld id="{E9DF187F-4815-419E-8F35-3823A7E7BFBF}" type="datetimeFigureOut">
               <a:rPr lang="en-IN" smtClean="0"/>
-              <a:t>14-11-2022</a:t>
+              <a:t>17-11-2022</a:t>
             </a:fld>
             <a:endParaRPr lang="en-IN"/>
           </a:p>
@@ -4418,7 +4418,7 @@
           <a:p>
             <a:fld id="{E9DF187F-4815-419E-8F35-3823A7E7BFBF}" type="datetimeFigureOut">
               <a:rPr lang="en-IN" smtClean="0"/>
-              <a:t>14-11-2022</a:t>
+              <a:t>17-11-2022</a:t>
             </a:fld>
             <a:endParaRPr lang="en-IN"/>
           </a:p>
@@ -4513,7 +4513,7 @@
           <a:p>
             <a:fld id="{E9DF187F-4815-419E-8F35-3823A7E7BFBF}" type="datetimeFigureOut">
               <a:rPr lang="en-IN" smtClean="0"/>
-              <a:t>14-11-2022</a:t>
+              <a:t>17-11-2022</a:t>
             </a:fld>
             <a:endParaRPr lang="en-IN"/>
           </a:p>
@@ -4796,7 +4796,7 @@
           <a:p>
             <a:fld id="{E9DF187F-4815-419E-8F35-3823A7E7BFBF}" type="datetimeFigureOut">
               <a:rPr lang="en-IN" smtClean="0"/>
-              <a:t>14-11-2022</a:t>
+              <a:t>17-11-2022</a:t>
             </a:fld>
             <a:endParaRPr lang="en-IN"/>
           </a:p>
@@ -5087,7 +5087,7 @@
           <a:p>
             <a:fld id="{E9DF187F-4815-419E-8F35-3823A7E7BFBF}" type="datetimeFigureOut">
               <a:rPr lang="en-IN" smtClean="0"/>
-              <a:t>14-11-2022</a:t>
+              <a:t>17-11-2022</a:t>
             </a:fld>
             <a:endParaRPr lang="en-IN"/>
           </a:p>
@@ -5617,7 +5617,7 @@
           <a:p>
             <a:fld id="{E9DF187F-4815-419E-8F35-3823A7E7BFBF}" type="datetimeFigureOut">
               <a:rPr lang="en-IN" smtClean="0"/>
-              <a:t>14-11-2022</a:t>
+              <a:t>17-11-2022</a:t>
             </a:fld>
             <a:endParaRPr lang="en-IN"/>
           </a:p>
@@ -7097,7 +7097,27 @@
                 <a:effectLst/>
                 <a:latin typeface="+mj-lt"/>
               </a:rPr>
-              <a:t>Development of alternatives: The number of alternatives has to be reduced for further detailed analysis.</a:t>
+              <a:t>Development of alternatives: The number of </a:t>
+            </a:r>
+            <a:r>
+              <a:rPr lang="en-US" b="0" i="0">
+                <a:solidFill>
+                  <a:srgbClr val="000000"/>
+                </a:solidFill>
+                <a:effectLst/>
+                <a:latin typeface="+mj-lt"/>
+              </a:rPr>
+              <a:t>alternatives have </a:t>
+            </a:r>
+            <a:r>
+              <a:rPr lang="en-US" b="0" i="0" dirty="0">
+                <a:solidFill>
+                  <a:srgbClr val="000000"/>
+                </a:solidFill>
+                <a:effectLst/>
+                <a:latin typeface="+mj-lt"/>
+              </a:rPr>
+              <a:t>to be reduced for further detailed analysis.</a:t>
             </a:r>
           </a:p>
           <a:p>

--- a/Extras/Economics of Project Management.pptx
+++ b/Extras/Economics of Project Management.pptx
@@ -625,7 +625,7 @@
           <a:p>
             <a:fld id="{E9DF187F-4815-419E-8F35-3823A7E7BFBF}" type="datetimeFigureOut">
               <a:rPr lang="en-IN" smtClean="0"/>
-              <a:t>17-11-2022</a:t>
+              <a:t>21-11-2022</a:t>
             </a:fld>
             <a:endParaRPr lang="en-IN"/>
           </a:p>
@@ -921,7 +921,7 @@
           <a:p>
             <a:fld id="{E9DF187F-4815-419E-8F35-3823A7E7BFBF}" type="datetimeFigureOut">
               <a:rPr lang="en-IN" smtClean="0"/>
-              <a:t>17-11-2022</a:t>
+              <a:t>21-11-2022</a:t>
             </a:fld>
             <a:endParaRPr lang="en-IN"/>
           </a:p>
@@ -1169,7 +1169,7 @@
           <a:p>
             <a:fld id="{E9DF187F-4815-419E-8F35-3823A7E7BFBF}" type="datetimeFigureOut">
               <a:rPr lang="en-IN" smtClean="0"/>
-              <a:t>17-11-2022</a:t>
+              <a:t>21-11-2022</a:t>
             </a:fld>
             <a:endParaRPr lang="en-IN"/>
           </a:p>
@@ -1709,7 +1709,7 @@
           <a:p>
             <a:fld id="{E9DF187F-4815-419E-8F35-3823A7E7BFBF}" type="datetimeFigureOut">
               <a:rPr lang="en-IN" smtClean="0"/>
-              <a:t>17-11-2022</a:t>
+              <a:t>21-11-2022</a:t>
             </a:fld>
             <a:endParaRPr lang="en-IN"/>
           </a:p>
@@ -1957,7 +1957,7 @@
           <a:p>
             <a:fld id="{E9DF187F-4815-419E-8F35-3823A7E7BFBF}" type="datetimeFigureOut">
               <a:rPr lang="en-IN" smtClean="0"/>
-              <a:t>17-11-2022</a:t>
+              <a:t>21-11-2022</a:t>
             </a:fld>
             <a:endParaRPr lang="en-IN"/>
           </a:p>
@@ -2489,7 +2489,7 @@
           <a:p>
             <a:fld id="{E9DF187F-4815-419E-8F35-3823A7E7BFBF}" type="datetimeFigureOut">
               <a:rPr lang="en-IN" smtClean="0"/>
-              <a:t>17-11-2022</a:t>
+              <a:t>21-11-2022</a:t>
             </a:fld>
             <a:endParaRPr lang="en-IN"/>
           </a:p>
@@ -2786,7 +2786,7 @@
           <a:p>
             <a:fld id="{E9DF187F-4815-419E-8F35-3823A7E7BFBF}" type="datetimeFigureOut">
               <a:rPr lang="en-IN" smtClean="0"/>
-              <a:t>17-11-2022</a:t>
+              <a:t>21-11-2022</a:t>
             </a:fld>
             <a:endParaRPr lang="en-IN"/>
           </a:p>
@@ -2960,7 +2960,7 @@
           <a:p>
             <a:fld id="{E9DF187F-4815-419E-8F35-3823A7E7BFBF}" type="datetimeFigureOut">
               <a:rPr lang="en-IN" smtClean="0"/>
-              <a:t>17-11-2022</a:t>
+              <a:t>21-11-2022</a:t>
             </a:fld>
             <a:endParaRPr lang="en-IN"/>
           </a:p>
@@ -3140,7 +3140,7 @@
           <a:p>
             <a:fld id="{E9DF187F-4815-419E-8F35-3823A7E7BFBF}" type="datetimeFigureOut">
               <a:rPr lang="en-IN" smtClean="0"/>
-              <a:t>17-11-2022</a:t>
+              <a:t>21-11-2022</a:t>
             </a:fld>
             <a:endParaRPr lang="en-IN"/>
           </a:p>
@@ -3310,7 +3310,7 @@
           <a:p>
             <a:fld id="{E9DF187F-4815-419E-8F35-3823A7E7BFBF}" type="datetimeFigureOut">
               <a:rPr lang="en-IN" smtClean="0"/>
-              <a:t>17-11-2022</a:t>
+              <a:t>21-11-2022</a:t>
             </a:fld>
             <a:endParaRPr lang="en-IN"/>
           </a:p>
@@ -3561,7 +3561,7 @@
           <a:p>
             <a:fld id="{E9DF187F-4815-419E-8F35-3823A7E7BFBF}" type="datetimeFigureOut">
               <a:rPr lang="en-IN" smtClean="0"/>
-              <a:t>17-11-2022</a:t>
+              <a:t>21-11-2022</a:t>
             </a:fld>
             <a:endParaRPr lang="en-IN"/>
           </a:p>
@@ -3858,7 +3858,7 @@
           <a:p>
             <a:fld id="{E9DF187F-4815-419E-8F35-3823A7E7BFBF}" type="datetimeFigureOut">
               <a:rPr lang="en-IN" smtClean="0"/>
-              <a:t>17-11-2022</a:t>
+              <a:t>21-11-2022</a:t>
             </a:fld>
             <a:endParaRPr lang="en-IN"/>
           </a:p>
@@ -4300,7 +4300,7 @@
           <a:p>
             <a:fld id="{E9DF187F-4815-419E-8F35-3823A7E7BFBF}" type="datetimeFigureOut">
               <a:rPr lang="en-IN" smtClean="0"/>
-              <a:t>17-11-2022</a:t>
+              <a:t>21-11-2022</a:t>
             </a:fld>
             <a:endParaRPr lang="en-IN"/>
           </a:p>
@@ -4418,7 +4418,7 @@
           <a:p>
             <a:fld id="{E9DF187F-4815-419E-8F35-3823A7E7BFBF}" type="datetimeFigureOut">
               <a:rPr lang="en-IN" smtClean="0"/>
-              <a:t>17-11-2022</a:t>
+              <a:t>21-11-2022</a:t>
             </a:fld>
             <a:endParaRPr lang="en-IN"/>
           </a:p>
@@ -4513,7 +4513,7 @@
           <a:p>
             <a:fld id="{E9DF187F-4815-419E-8F35-3823A7E7BFBF}" type="datetimeFigureOut">
               <a:rPr lang="en-IN" smtClean="0"/>
-              <a:t>17-11-2022</a:t>
+              <a:t>21-11-2022</a:t>
             </a:fld>
             <a:endParaRPr lang="en-IN"/>
           </a:p>
@@ -4796,7 +4796,7 @@
           <a:p>
             <a:fld id="{E9DF187F-4815-419E-8F35-3823A7E7BFBF}" type="datetimeFigureOut">
               <a:rPr lang="en-IN" smtClean="0"/>
-              <a:t>17-11-2022</a:t>
+              <a:t>21-11-2022</a:t>
             </a:fld>
             <a:endParaRPr lang="en-IN"/>
           </a:p>
@@ -5087,7 +5087,7 @@
           <a:p>
             <a:fld id="{E9DF187F-4815-419E-8F35-3823A7E7BFBF}" type="datetimeFigureOut">
               <a:rPr lang="en-IN" smtClean="0"/>
-              <a:t>17-11-2022</a:t>
+              <a:t>21-11-2022</a:t>
             </a:fld>
             <a:endParaRPr lang="en-IN"/>
           </a:p>
@@ -5617,7 +5617,7 @@
           <a:p>
             <a:fld id="{E9DF187F-4815-419E-8F35-3823A7E7BFBF}" type="datetimeFigureOut">
               <a:rPr lang="en-IN" smtClean="0"/>
-              <a:t>17-11-2022</a:t>
+              <a:t>21-11-2022</a:t>
             </a:fld>
             <a:endParaRPr lang="en-IN"/>
           </a:p>
@@ -6320,6 +6320,20 @@
               <a:tabLst/>
             </a:pPr>
             <a:r>
+              <a:rPr kumimoji="0" lang="en-US" altLang="en-US" sz="2400" b="0" i="0" u="none" strike="noStrike" cap="none" normalizeH="0" baseline="0">
+                <a:ln>
+                  <a:noFill/>
+                </a:ln>
+                <a:solidFill>
+                  <a:srgbClr val="000000"/>
+                </a:solidFill>
+                <a:effectLst/>
+                <a:latin typeface="Open Sans" panose="020B0606030504020204" pitchFamily="34" charset="0"/>
+                <a:cs typeface="Open Sans" panose="020B0606030504020204" pitchFamily="34" charset="0"/>
+              </a:rPr>
+              <a:t>- </a:t>
+            </a:r>
+            <a:r>
               <a:rPr kumimoji="0" lang="en-US" altLang="en-US" sz="2400" b="0" i="0" u="none" strike="noStrike" cap="none" normalizeH="0" baseline="0" dirty="0">
                 <a:ln>
                   <a:noFill/>
@@ -6331,48 +6345,7 @@
                 <a:latin typeface="Open Sans" panose="020B0606030504020204" pitchFamily="34" charset="0"/>
                 <a:cs typeface="Open Sans" panose="020B0606030504020204" pitchFamily="34" charset="0"/>
               </a:rPr>
-              <a:t>This may be classified according to the managerial problems.</a:t>
-            </a:r>
-            <a:endParaRPr kumimoji="0" lang="en-US" altLang="en-US" sz="1100" b="0" i="0" u="none" strike="noStrike" cap="none" normalizeH="0" baseline="0" dirty="0">
-              <a:ln>
-                <a:noFill/>
-              </a:ln>
-              <a:solidFill>
-                <a:schemeClr val="tx1"/>
-              </a:solidFill>
-              <a:effectLst/>
-            </a:endParaRPr>
-          </a:p>
-          <a:p>
-            <a:pPr marL="0" marR="0" lvl="0" indent="0" algn="l" defTabSz="914400" rtl="0" eaLnBrk="0" fontAlgn="base" latinLnBrk="0" hangingPunct="0">
-              <a:lnSpc>
-                <a:spcPct val="100000"/>
-              </a:lnSpc>
-              <a:spcBef>
-                <a:spcPct val="0"/>
-              </a:spcBef>
-              <a:spcAft>
-                <a:spcPct val="0"/>
-              </a:spcAft>
-              <a:buClrTx/>
-              <a:buSzTx/>
-              <a:buFontTx/>
-              <a:buNone/>
-              <a:tabLst/>
-            </a:pPr>
-            <a:r>
-              <a:rPr kumimoji="0" lang="en-US" altLang="en-US" sz="2400" b="0" i="0" u="none" strike="noStrike" cap="none" normalizeH="0" baseline="0" dirty="0">
-                <a:ln>
-                  <a:noFill/>
-                </a:ln>
-                <a:solidFill>
-                  <a:srgbClr val="000000"/>
-                </a:solidFill>
-                <a:effectLst/>
-                <a:latin typeface="Open Sans" panose="020B0606030504020204" pitchFamily="34" charset="0"/>
-                <a:cs typeface="Open Sans" panose="020B0606030504020204" pitchFamily="34" charset="0"/>
-              </a:rPr>
-              <a:t>- New construction</a:t>
+              <a:t>New construction</a:t>
             </a:r>
           </a:p>
           <a:p>
